--- a/02_Presentacion_PPTX/TrabajoFinalEyTBChillonFedericoAluar_HOMOGENEO.pptx
+++ b/02_Presentacion_PPTX/TrabajoFinalEyTBChillonFedericoAluar_HOMOGENEO.pptx
@@ -22233,7 +22233,7 @@
               </a:defRPr>
             </a:pPr>
             <a:r>
-              <a:t>ALOCACIÓN HALF-KELLY</a:t>
+              <a:t>ALOCACIÓN MÁXIMA (CVaR)</a:t>
             </a:r>
           </a:p>
           <a:p>
@@ -22246,7 +22246,7 @@
               </a:defRPr>
             </a:pPr>
             <a:r>
-              <a:t>36.8% Cartera</a:t>
+              <a:t>20.0% Cartera</a:t>
             </a:r>
           </a:p>
         </p:txBody>
@@ -25035,7 +25035,7 @@
                 </a:solidFill>
                 <a:latin typeface="Segoe UI"/>
               </a:rPr>
-              <a:t>Tamaño de posición recomendado: 36.8% de la cartera (Half-Kelly), acotado por un CVaR a 21 ruedas de -32.8%. </a:t>
+              <a:t>Half-Kelly sugiere 36.8% de la cartera, pero excede el limite de politica de riesgo (20% CVaR maximo); tamano de posicion efectivamente recomendado: 20%. </a:t>
             </a:r>
           </a:p>
           <a:p>
